--- a/catalog/samples/big_stat_pair.pptx
+++ b/catalog/samples/big_stat_pair.pptx
@@ -1022,7 +1022,7 @@
           </a:p>
           <a:p>
             <a:r>
-              <a:t>  "template_sha256": "d1b733958a2ef03cc771b08533bbefdb0e26740c6708c48ec7e047f2a9ace5d2"</a:t>
+              <a:t>  "template_sha256": "6dfa296f139507743015b0a4339f042ed6e926252c422dba6affab49a974f799"</a:t>
             </a:r>
           </a:p>
           <a:p>
